--- a/Publication/ПрезентацияСамойлова.pptx
+++ b/Publication/ПрезентацияСамойлова.pptx
@@ -3111,7 +3111,7 @@
           <p:nvPr/>
         </p:nvPicPr>
         <p:blipFill>
-          <a:blip r:embed="rId2"/>
+          <a:blip r:embed="rId2" cstate="print"/>
           <a:stretch>
             <a:fillRect/>
           </a:stretch>
@@ -3507,7 +3507,7 @@
           <p:nvPr/>
         </p:nvPicPr>
         <p:blipFill>
-          <a:blip r:embed="rId2"/>
+          <a:blip r:embed="rId2" cstate="print"/>
           <a:srcRect/>
           <a:stretch>
             <a:fillRect/>
@@ -3590,32 +3590,34 @@
           </a:p>
         </p:txBody>
       </p:sp>
-      <p:sp>
-        <p:nvSpPr>
-          <p:cNvPr id="3" name="Содержимое 2"/>
-          <p:cNvSpPr>
-            <a:spLocks noGrp="1"/>
-          </p:cNvSpPr>
+      <p:pic>
+        <p:nvPicPr>
+          <p:cNvPr id="1026" name="Picture 2" descr="C:\Users\android242\Downloads\Untitled Diagram.drawio.png"/>
+          <p:cNvPicPr>
+            <a:picLocks noGrp="1" noChangeAspect="1" noChangeArrowheads="1"/>
+          </p:cNvPicPr>
           <p:nvPr>
             <p:ph idx="1"/>
           </p:nvPr>
-        </p:nvSpPr>
-        <p:spPr>
+        </p:nvPicPr>
+        <p:blipFill>
+          <a:blip r:embed="rId2" cstate="print"/>
+          <a:srcRect/>
+          <a:stretch>
+            <a:fillRect/>
+          </a:stretch>
+        </p:blipFill>
+        <p:spPr bwMode="auto">
           <a:xfrm>
-            <a:off x="357158" y="1785926"/>
-            <a:ext cx="8358246" cy="3929090"/>
+            <a:off x="1547664" y="1988840"/>
+            <a:ext cx="6192688" cy="3794112"/>
           </a:xfrm>
+          <a:prstGeom prst="rect">
+            <a:avLst/>
+          </a:prstGeom>
+          <a:noFill/>
         </p:spPr>
-        <p:txBody>
-          <a:bodyPr>
-            <a:normAutofit/>
-          </a:bodyPr>
-          <a:lstStyle/>
-          <a:p>
-            <a:endParaRPr lang="ru-RU" dirty="0"/>
-          </a:p>
-        </p:txBody>
-      </p:sp>
+      </p:pic>
     </p:spTree>
   </p:cSld>
   <p:clrMapOvr>
@@ -3668,19 +3670,7 @@
                 <a:latin typeface="Times New Roman" pitchFamily="18" charset="0"/>
                 <a:cs typeface="Times New Roman" pitchFamily="18" charset="0"/>
               </a:rPr>
-              <a:t>Архитектурные </a:t>
-            </a:r>
-            <a:r>
-              <a:rPr lang="ru-RU" spc="-50" dirty="0" smtClean="0">
-                <a:solidFill>
-                  <a:schemeClr val="accent1">
-                    <a:lumMod val="75000"/>
-                  </a:schemeClr>
-                </a:solidFill>
-                <a:latin typeface="Times New Roman" pitchFamily="18" charset="0"/>
-                <a:cs typeface="Times New Roman" pitchFamily="18" charset="0"/>
-              </a:rPr>
-              <a:t>решения</a:t>
+              <a:t>Архитектурные решения</a:t>
             </a:r>
             <a:endParaRPr lang="ru-RU" dirty="0">
               <a:solidFill>
@@ -3724,98 +3714,70 @@
                 <a:latin typeface="Times New Roman" pitchFamily="18" charset="0"/>
                 <a:cs typeface="Times New Roman" pitchFamily="18" charset="0"/>
               </a:rPr>
-              <a:t>           В </a:t>
+              <a:t>           В качестве архитектурного решения был выбран паттерн MVVM</a:t>
+            </a:r>
+            <a:r>
+              <a:rPr lang="ru-RU" b="1" dirty="0" smtClean="0">
+                <a:latin typeface="Times New Roman" pitchFamily="18" charset="0"/>
+                <a:cs typeface="Times New Roman" pitchFamily="18" charset="0"/>
+              </a:rPr>
+              <a:t> </a:t>
             </a:r>
             <a:r>
               <a:rPr lang="ru-RU" dirty="0" smtClean="0">
                 <a:latin typeface="Times New Roman" pitchFamily="18" charset="0"/>
                 <a:cs typeface="Times New Roman" pitchFamily="18" charset="0"/>
               </a:rPr>
-              <a:t>качестве архитектурного решения был выбран паттерн </a:t>
+              <a:t>(</a:t>
+            </a:r>
+            <a:r>
+              <a:rPr lang="ru-RU" dirty="0" err="1" smtClean="0">
+                <a:latin typeface="Times New Roman" pitchFamily="18" charset="0"/>
+                <a:cs typeface="Times New Roman" pitchFamily="18" charset="0"/>
+              </a:rPr>
+              <a:t>Model</a:t>
             </a:r>
             <a:r>
               <a:rPr lang="ru-RU" dirty="0" smtClean="0">
                 <a:latin typeface="Times New Roman" pitchFamily="18" charset="0"/>
                 <a:cs typeface="Times New Roman" pitchFamily="18" charset="0"/>
               </a:rPr>
-              <a:t>MVVM</a:t>
+              <a:t>–</a:t>
+            </a:r>
+            <a:r>
+              <a:rPr lang="ru-RU" dirty="0" err="1" smtClean="0">
+                <a:latin typeface="Times New Roman" pitchFamily="18" charset="0"/>
+                <a:cs typeface="Times New Roman" pitchFamily="18" charset="0"/>
+              </a:rPr>
+              <a:t>View</a:t>
+            </a:r>
+            <a:r>
+              <a:rPr lang="ru-RU" dirty="0" smtClean="0">
+                <a:latin typeface="Times New Roman" pitchFamily="18" charset="0"/>
+                <a:cs typeface="Times New Roman" pitchFamily="18" charset="0"/>
+              </a:rPr>
+              <a:t>–</a:t>
+            </a:r>
+            <a:r>
+              <a:rPr lang="ru-RU" dirty="0" err="1" smtClean="0">
+                <a:latin typeface="Times New Roman" pitchFamily="18" charset="0"/>
+                <a:cs typeface="Times New Roman" pitchFamily="18" charset="0"/>
+              </a:rPr>
+              <a:t>ViewModel</a:t>
             </a:r>
             <a:r>
               <a:rPr lang="ru-RU" b="1" dirty="0" smtClean="0">
                 <a:latin typeface="Times New Roman" pitchFamily="18" charset="0"/>
                 <a:cs typeface="Times New Roman" pitchFamily="18" charset="0"/>
               </a:rPr>
-              <a:t> </a:t>
+              <a:t>)</a:t>
             </a:r>
             <a:r>
               <a:rPr lang="ru-RU" dirty="0" smtClean="0">
                 <a:latin typeface="Times New Roman" pitchFamily="18" charset="0"/>
                 <a:cs typeface="Times New Roman" pitchFamily="18" charset="0"/>
               </a:rPr>
-              <a:t>(</a:t>
-            </a:r>
-            <a:r>
-              <a:rPr lang="ru-RU" dirty="0" err="1" smtClean="0">
-                <a:latin typeface="Times New Roman" pitchFamily="18" charset="0"/>
-                <a:cs typeface="Times New Roman" pitchFamily="18" charset="0"/>
-              </a:rPr>
-              <a:t>Model</a:t>
-            </a:r>
-            <a:r>
-              <a:rPr lang="ru-RU" dirty="0" smtClean="0">
-                <a:latin typeface="Times New Roman" pitchFamily="18" charset="0"/>
-                <a:cs typeface="Times New Roman" pitchFamily="18" charset="0"/>
-              </a:rPr>
-              <a:t>–</a:t>
-            </a:r>
-            <a:r>
-              <a:rPr lang="ru-RU" dirty="0" err="1" smtClean="0">
-                <a:latin typeface="Times New Roman" pitchFamily="18" charset="0"/>
-                <a:cs typeface="Times New Roman" pitchFamily="18" charset="0"/>
-              </a:rPr>
-              <a:t>View</a:t>
-            </a:r>
-            <a:r>
-              <a:rPr lang="ru-RU" dirty="0" smtClean="0">
-                <a:latin typeface="Times New Roman" pitchFamily="18" charset="0"/>
-                <a:cs typeface="Times New Roman" pitchFamily="18" charset="0"/>
-              </a:rPr>
-              <a:t>–</a:t>
-            </a:r>
-            <a:r>
-              <a:rPr lang="ru-RU" dirty="0" err="1" smtClean="0">
-                <a:latin typeface="Times New Roman" pitchFamily="18" charset="0"/>
-                <a:cs typeface="Times New Roman" pitchFamily="18" charset="0"/>
-              </a:rPr>
-              <a:t>ViewModel</a:t>
-            </a:r>
-            <a:r>
-              <a:rPr lang="ru-RU" b="1" dirty="0" smtClean="0">
-                <a:latin typeface="Times New Roman" pitchFamily="18" charset="0"/>
-                <a:cs typeface="Times New Roman" pitchFamily="18" charset="0"/>
-              </a:rPr>
-              <a:t>)</a:t>
-            </a:r>
-            <a:r>
-              <a:rPr lang="ru-RU" dirty="0" smtClean="0">
-                <a:latin typeface="Times New Roman" pitchFamily="18" charset="0"/>
-                <a:cs typeface="Times New Roman" pitchFamily="18" charset="0"/>
-              </a:rPr>
-              <a:t>.</a:t>
-            </a:r>
-            <a:r>
-              <a:rPr lang="ru-RU" dirty="0" smtClean="0">
-                <a:latin typeface="Times New Roman" pitchFamily="18" charset="0"/>
-                <a:cs typeface="Times New Roman" pitchFamily="18" charset="0"/>
-              </a:rPr>
-              <a:t>, </a:t>
-            </a:r>
-            <a:r>
-              <a:rPr lang="ru-RU" dirty="0" smtClean="0">
-                <a:latin typeface="Times New Roman" pitchFamily="18" charset="0"/>
-                <a:cs typeface="Times New Roman" pitchFamily="18" charset="0"/>
-              </a:rPr>
-              <a:t>поскольку он обеспечивает эффективное взаимодействие с </a:t>
+              <a:t>., поскольку он обеспечивает эффективное взаимодействие с </a:t>
             </a:r>
             <a:r>
               <a:rPr lang="ru-RU" dirty="0" err="1" smtClean="0">
@@ -3945,11 +3907,7 @@
             </a:r>
             <a:r>
               <a:rPr lang="ru-RU" sz="2800" dirty="0" smtClean="0"/>
-              <a:t> </a:t>
-            </a:r>
-            <a:r>
-              <a:rPr lang="ru-RU" sz="2800" dirty="0" smtClean="0"/>
-              <a:t>данных: расположены </a:t>
+              <a:t> данных: расположены </a:t>
             </a:r>
             <a:r>
               <a:rPr lang="en-US" sz="2800" dirty="0" smtClean="0"/>
@@ -3999,11 +3957,7 @@
             </a:r>
             <a:r>
               <a:rPr lang="ru-RU" sz="2800" dirty="0" smtClean="0"/>
-              <a:t>компоненты</a:t>
-            </a:r>
-            <a:r>
-              <a:rPr lang="ru-RU" sz="2800" dirty="0" smtClean="0"/>
-              <a:t>:  расположены </a:t>
+              <a:t>компоненты:  расположены </a:t>
             </a:r>
             <a:r>
               <a:rPr lang="en-US" sz="2800" dirty="0" err="1" smtClean="0"/>
@@ -4123,19 +4077,7 @@
                 <a:latin typeface="Times New Roman" pitchFamily="18" charset="0"/>
                 <a:cs typeface="Times New Roman" pitchFamily="18" charset="0"/>
               </a:rPr>
-              <a:t>Используемые </a:t>
-            </a:r>
-            <a:r>
-              <a:rPr lang="ru-RU" spc="-50" dirty="0" smtClean="0">
-                <a:solidFill>
-                  <a:schemeClr val="accent1">
-                    <a:lumMod val="75000"/>
-                  </a:schemeClr>
-                </a:solidFill>
-                <a:latin typeface="Times New Roman" pitchFamily="18" charset="0"/>
-                <a:cs typeface="Times New Roman" pitchFamily="18" charset="0"/>
-              </a:rPr>
-              <a:t>библиотеки</a:t>
+              <a:t>Используемые библиотеки</a:t>
             </a:r>
             <a:endParaRPr lang="ru-RU" dirty="0">
               <a:solidFill>
@@ -4183,14 +4125,7 @@
                 <a:latin typeface="Times New Roman" pitchFamily="18" charset="0"/>
                 <a:cs typeface="Times New Roman" pitchFamily="18" charset="0"/>
               </a:rPr>
-              <a:t>Библиотека для работы с REST API</a:t>
-            </a:r>
-            <a:r>
-              <a:rPr lang="ru-RU" dirty="0" smtClean="0">
-                <a:latin typeface="Times New Roman" pitchFamily="18" charset="0"/>
-                <a:cs typeface="Times New Roman" pitchFamily="18" charset="0"/>
-              </a:rPr>
-              <a:t>.</a:t>
+              <a:t>Библиотека для работы с REST API.</a:t>
             </a:r>
             <a:endParaRPr lang="en-US" dirty="0" smtClean="0">
               <a:latin typeface="Times New Roman" pitchFamily="18" charset="0"/>
@@ -4203,42 +4138,28 @@
                 <a:latin typeface="Times New Roman" pitchFamily="18" charset="0"/>
                 <a:cs typeface="Times New Roman" pitchFamily="18" charset="0"/>
               </a:rPr>
-              <a:t>Navigation </a:t>
+              <a:t>Navigation Compose - </a:t>
+            </a:r>
+            <a:r>
+              <a:rPr lang="ru-RU" dirty="0" smtClean="0">
+                <a:latin typeface="Times New Roman" pitchFamily="18" charset="0"/>
+                <a:cs typeface="Times New Roman" pitchFamily="18" charset="0"/>
+              </a:rPr>
+              <a:t>Компонент для</a:t>
             </a:r>
             <a:r>
               <a:rPr lang="en-US" dirty="0" smtClean="0">
                 <a:latin typeface="Times New Roman" pitchFamily="18" charset="0"/>
                 <a:cs typeface="Times New Roman" pitchFamily="18" charset="0"/>
               </a:rPr>
-              <a:t>Compose - </a:t>
+              <a:t> </a:t>
             </a:r>
             <a:r>
               <a:rPr lang="ru-RU" dirty="0" smtClean="0">
                 <a:latin typeface="Times New Roman" pitchFamily="18" charset="0"/>
                 <a:cs typeface="Times New Roman" pitchFamily="18" charset="0"/>
               </a:rPr>
-              <a:t>Компонент для</a:t>
-            </a:r>
-            <a:r>
-              <a:rPr lang="en-US" dirty="0" smtClean="0">
-                <a:latin typeface="Times New Roman" pitchFamily="18" charset="0"/>
-                <a:cs typeface="Times New Roman" pitchFamily="18" charset="0"/>
-              </a:rPr>
-              <a:t> </a:t>
-            </a:r>
-            <a:r>
-              <a:rPr lang="ru-RU" dirty="0" smtClean="0">
-                <a:latin typeface="Times New Roman" pitchFamily="18" charset="0"/>
-                <a:cs typeface="Times New Roman" pitchFamily="18" charset="0"/>
-              </a:rPr>
-              <a:t>навигации </a:t>
-            </a:r>
-            <a:r>
-              <a:rPr lang="ru-RU" dirty="0" smtClean="0">
-                <a:latin typeface="Times New Roman" pitchFamily="18" charset="0"/>
-                <a:cs typeface="Times New Roman" pitchFamily="18" charset="0"/>
-              </a:rPr>
-              <a:t>между экранами в </a:t>
+              <a:t>навигации между экранами в </a:t>
             </a:r>
             <a:r>
               <a:rPr lang="ru-RU" dirty="0" err="1" smtClean="0">
@@ -4279,14 +4200,7 @@
                 <a:latin typeface="Times New Roman" pitchFamily="18" charset="0"/>
                 <a:cs typeface="Times New Roman" pitchFamily="18" charset="0"/>
               </a:rPr>
-              <a:t>Material </a:t>
-            </a:r>
-            <a:r>
-              <a:rPr lang="en-US" dirty="0" smtClean="0">
-                <a:latin typeface="Times New Roman" pitchFamily="18" charset="0"/>
-                <a:cs typeface="Times New Roman" pitchFamily="18" charset="0"/>
-              </a:rPr>
-              <a:t>3 - </a:t>
+              <a:t>Material 3 - </a:t>
             </a:r>
             <a:r>
               <a:rPr lang="ru-RU" dirty="0" smtClean="0">
@@ -4368,19 +4282,7 @@
                 <a:latin typeface="Times New Roman" pitchFamily="18" charset="0"/>
                 <a:cs typeface="Times New Roman" pitchFamily="18" charset="0"/>
               </a:rPr>
-              <a:t>Фото </a:t>
-            </a:r>
-            <a:r>
-              <a:rPr lang="ru-RU" spc="-50" dirty="0" smtClean="0">
-                <a:solidFill>
-                  <a:schemeClr val="accent1">
-                    <a:lumMod val="75000"/>
-                  </a:schemeClr>
-                </a:solidFill>
-                <a:latin typeface="Times New Roman" pitchFamily="18" charset="0"/>
-                <a:cs typeface="Times New Roman" pitchFamily="18" charset="0"/>
-              </a:rPr>
-              <a:t>приложения</a:t>
+              <a:t>Фото приложения</a:t>
             </a:r>
             <a:endParaRPr lang="ru-RU" dirty="0">
               <a:solidFill>
@@ -4403,7 +4305,7 @@
           <p:nvPr/>
         </p:nvPicPr>
         <p:blipFill>
-          <a:blip r:embed="rId2"/>
+          <a:blip r:embed="rId2" cstate="print"/>
           <a:srcRect/>
           <a:stretch>
             <a:fillRect/>
@@ -4429,7 +4331,7 @@
           <p:nvPr/>
         </p:nvPicPr>
         <p:blipFill>
-          <a:blip r:embed="rId3"/>
+          <a:blip r:embed="rId3" cstate="print"/>
           <a:srcRect/>
           <a:stretch>
             <a:fillRect/>
@@ -4455,7 +4357,7 @@
           <p:nvPr/>
         </p:nvPicPr>
         <p:blipFill>
-          <a:blip r:embed="rId4"/>
+          <a:blip r:embed="rId4" cstate="print"/>
           <a:srcRect/>
           <a:stretch>
             <a:fillRect/>

--- a/Publication/ПрезентацияСамойлова.pptx
+++ b/Publication/ПрезентацияСамойлова.pptx
@@ -3326,8 +3326,8 @@
         </p:nvSpPr>
         <p:spPr>
           <a:xfrm>
-            <a:off x="2643174" y="1785926"/>
-            <a:ext cx="6215106" cy="4071966"/>
+            <a:off x="2987824" y="1556792"/>
+            <a:ext cx="5832648" cy="2075122"/>
           </a:xfrm>
         </p:spPr>
         <p:txBody>
@@ -3340,158 +3340,197 @@
               <a:buNone/>
             </a:pPr>
             <a:r>
-              <a:rPr lang="ru-RU" dirty="0">
-                <a:latin typeface="Times New Roman" pitchFamily="18" charset="0"/>
-                <a:cs typeface="Times New Roman" pitchFamily="18" charset="0"/>
-              </a:rPr>
-              <a:t>В процессе разработки Android-приложения </a:t>
+              <a:rPr lang="ru-RU" b="1" dirty="0" smtClean="0">
+                <a:latin typeface="Times New Roman" pitchFamily="18" charset="0"/>
+                <a:cs typeface="Times New Roman" pitchFamily="18" charset="0"/>
+              </a:rPr>
+              <a:t>Платформа: </a:t>
+            </a:r>
+            <a:r>
+              <a:rPr lang="en-US" dirty="0" smtClean="0">
+                <a:latin typeface="Times New Roman" pitchFamily="18" charset="0"/>
+                <a:cs typeface="Times New Roman" pitchFamily="18" charset="0"/>
+              </a:rPr>
+              <a:t>Android 16 (API 36</a:t>
+            </a:r>
+            <a:r>
+              <a:rPr lang="en-US" dirty="0" smtClean="0">
+                <a:latin typeface="Times New Roman" pitchFamily="18" charset="0"/>
+                <a:cs typeface="Times New Roman" pitchFamily="18" charset="0"/>
+              </a:rPr>
+              <a:t>)</a:t>
             </a:r>
             <a:r>
               <a:rPr lang="ru-RU" dirty="0" smtClean="0">
                 <a:latin typeface="Times New Roman" pitchFamily="18" charset="0"/>
                 <a:cs typeface="Times New Roman" pitchFamily="18" charset="0"/>
               </a:rPr>
-              <a:t>(версия </a:t>
-            </a:r>
-            <a:r>
-              <a:rPr lang="ru-RU" dirty="0" err="1">
-                <a:latin typeface="Times New Roman" pitchFamily="18" charset="0"/>
-                <a:cs typeface="Times New Roman" pitchFamily="18" charset="0"/>
-              </a:rPr>
-              <a:t>Android</a:t>
-            </a:r>
-            <a:r>
-              <a:rPr lang="ru-RU" dirty="0">
-                <a:latin typeface="Times New Roman" pitchFamily="18" charset="0"/>
-                <a:cs typeface="Times New Roman" pitchFamily="18" charset="0"/>
-              </a:rPr>
-              <a:t> 16, API </a:t>
-            </a:r>
-            <a:r>
-              <a:rPr lang="ru-RU" dirty="0" smtClean="0">
-                <a:latin typeface="Times New Roman" pitchFamily="18" charset="0"/>
-                <a:cs typeface="Times New Roman" pitchFamily="18" charset="0"/>
-              </a:rPr>
-              <a:t>36</a:t>
-            </a:r>
-            <a:r>
-              <a:rPr lang="ru-RU" dirty="0">
-                <a:latin typeface="Times New Roman" pitchFamily="18" charset="0"/>
-                <a:cs typeface="Times New Roman" pitchFamily="18" charset="0"/>
-              </a:rPr>
-              <a:t>) была применена архитектура MVVM (</a:t>
-            </a:r>
-            <a:r>
-              <a:rPr lang="ru-RU" dirty="0" err="1">
-                <a:latin typeface="Times New Roman" pitchFamily="18" charset="0"/>
-                <a:cs typeface="Times New Roman" pitchFamily="18" charset="0"/>
-              </a:rPr>
-              <a:t>Model-View-ViewModel</a:t>
-            </a:r>
-            <a:r>
-              <a:rPr lang="ru-RU" dirty="0">
-                <a:latin typeface="Times New Roman" pitchFamily="18" charset="0"/>
-                <a:cs typeface="Times New Roman" pitchFamily="18" charset="0"/>
-              </a:rPr>
-              <a:t>) с использованием языка </a:t>
-            </a:r>
-            <a:r>
-              <a:rPr lang="ru-RU" dirty="0" err="1">
-                <a:latin typeface="Times New Roman" pitchFamily="18" charset="0"/>
-                <a:cs typeface="Times New Roman" pitchFamily="18" charset="0"/>
-              </a:rPr>
-              <a:t>Kotlin</a:t>
-            </a:r>
-            <a:r>
-              <a:rPr lang="ru-RU" dirty="0">
-                <a:latin typeface="Times New Roman" pitchFamily="18" charset="0"/>
-                <a:cs typeface="Times New Roman" pitchFamily="18" charset="0"/>
-              </a:rPr>
-              <a:t>. Для построения пользовательского интерфейса и отдельных компонентов использовался </a:t>
-            </a:r>
-            <a:r>
-              <a:rPr lang="ru-RU" dirty="0" err="1">
-                <a:latin typeface="Times New Roman" pitchFamily="18" charset="0"/>
-                <a:cs typeface="Times New Roman" pitchFamily="18" charset="0"/>
-              </a:rPr>
-              <a:t>Jetpack</a:t>
-            </a:r>
-            <a:r>
-              <a:rPr lang="ru-RU" dirty="0">
-                <a:latin typeface="Times New Roman" pitchFamily="18" charset="0"/>
-                <a:cs typeface="Times New Roman" pitchFamily="18" charset="0"/>
-              </a:rPr>
-              <a:t> </a:t>
-            </a:r>
-            <a:r>
-              <a:rPr lang="ru-RU" dirty="0" err="1">
-                <a:latin typeface="Times New Roman" pitchFamily="18" charset="0"/>
-                <a:cs typeface="Times New Roman" pitchFamily="18" charset="0"/>
-              </a:rPr>
-              <a:t>Compose</a:t>
-            </a:r>
-            <a:r>
-              <a:rPr lang="ru-RU" dirty="0">
-                <a:latin typeface="Times New Roman" pitchFamily="18" charset="0"/>
-                <a:cs typeface="Times New Roman" pitchFamily="18" charset="0"/>
-              </a:rPr>
-              <a:t>. В качестве базы данных задействована реляционная платформа </a:t>
-            </a:r>
-            <a:r>
-              <a:rPr lang="ru-RU" dirty="0" err="1" smtClean="0">
-                <a:latin typeface="Times New Roman" pitchFamily="18" charset="0"/>
-                <a:cs typeface="Times New Roman" pitchFamily="18" charset="0"/>
-              </a:rPr>
-              <a:t>Supabase</a:t>
-            </a:r>
-            <a:r>
-              <a:rPr lang="ru-RU" dirty="0" smtClean="0">
-                <a:latin typeface="Times New Roman" pitchFamily="18" charset="0"/>
-                <a:cs typeface="Times New Roman" pitchFamily="18" charset="0"/>
-              </a:rPr>
               <a:t>.</a:t>
             </a:r>
-            <a:endParaRPr lang="en-US" dirty="0" smtClean="0">
-              <a:latin typeface="Times New Roman" pitchFamily="18" charset="0"/>
-              <a:cs typeface="Times New Roman" pitchFamily="18" charset="0"/>
-            </a:endParaRPr>
           </a:p>
           <a:p>
             <a:pPr indent="450000" algn="just">
               <a:buNone/>
             </a:pPr>
             <a:r>
-              <a:rPr lang="ru-RU" dirty="0" smtClean="0">
-                <a:latin typeface="Times New Roman" pitchFamily="18" charset="0"/>
-                <a:cs typeface="Times New Roman" pitchFamily="18" charset="0"/>
-              </a:rPr>
-              <a:t>Реализованы </a:t>
-            </a:r>
-            <a:r>
-              <a:rPr lang="ru-RU" dirty="0">
-                <a:latin typeface="Times New Roman" pitchFamily="18" charset="0"/>
-                <a:cs typeface="Times New Roman" pitchFamily="18" charset="0"/>
-              </a:rPr>
-              <a:t>функции авторизации, регистрации, подтверждения по OTP-коду, а также операции чтения и записи данных, предоставляемые через REST API и backend-сервисы </a:t>
-            </a:r>
-            <a:r>
-              <a:rPr lang="ru-RU" dirty="0" err="1">
-                <a:latin typeface="Times New Roman" pitchFamily="18" charset="0"/>
-                <a:cs typeface="Times New Roman" pitchFamily="18" charset="0"/>
-              </a:rPr>
-              <a:t>Supabase</a:t>
-            </a:r>
-            <a:r>
-              <a:rPr lang="ru-RU" dirty="0">
-                <a:latin typeface="Times New Roman" pitchFamily="18" charset="0"/>
-                <a:cs typeface="Times New Roman" pitchFamily="18" charset="0"/>
-              </a:rPr>
-              <a:t>.</a:t>
+              <a:rPr lang="ru-RU" b="1" dirty="0" smtClean="0">
+                <a:latin typeface="Times New Roman" pitchFamily="18" charset="0"/>
+                <a:cs typeface="Times New Roman" pitchFamily="18" charset="0"/>
+              </a:rPr>
+              <a:t>Архитектура приложения: </a:t>
+            </a:r>
+            <a:r>
+              <a:rPr lang="en-US" dirty="0" smtClean="0">
+                <a:latin typeface="Times New Roman" pitchFamily="18" charset="0"/>
+                <a:cs typeface="Times New Roman" pitchFamily="18" charset="0"/>
+              </a:rPr>
+              <a:t>MVVM (Model-View-</a:t>
+            </a:r>
+            <a:r>
+              <a:rPr lang="en-US" dirty="0" err="1" smtClean="0">
+                <a:latin typeface="Times New Roman" pitchFamily="18" charset="0"/>
+                <a:cs typeface="Times New Roman" pitchFamily="18" charset="0"/>
+              </a:rPr>
+              <a:t>ViewModel</a:t>
+            </a:r>
+            <a:r>
+              <a:rPr lang="en-US" dirty="0" smtClean="0">
+                <a:latin typeface="Times New Roman" pitchFamily="18" charset="0"/>
+                <a:cs typeface="Times New Roman" pitchFamily="18" charset="0"/>
+              </a:rPr>
+              <a:t>).</a:t>
             </a:r>
             <a:endParaRPr lang="ru-RU" dirty="0" smtClean="0">
               <a:latin typeface="Times New Roman" pitchFamily="18" charset="0"/>
               <a:cs typeface="Times New Roman" pitchFamily="18" charset="0"/>
             </a:endParaRPr>
+          </a:p>
+          <a:p>
+            <a:pPr indent="450000" algn="just">
+              <a:buNone/>
+            </a:pPr>
+            <a:r>
+              <a:rPr lang="ru-RU" b="1" dirty="0" smtClean="0">
+                <a:latin typeface="Times New Roman" pitchFamily="18" charset="0"/>
+                <a:cs typeface="Times New Roman" pitchFamily="18" charset="0"/>
+              </a:rPr>
+              <a:t>Язык разработки: </a:t>
+            </a:r>
+            <a:r>
+              <a:rPr lang="en-US" dirty="0" err="1" smtClean="0">
+                <a:latin typeface="Times New Roman" pitchFamily="18" charset="0"/>
+                <a:cs typeface="Times New Roman" pitchFamily="18" charset="0"/>
+              </a:rPr>
+              <a:t>Kotlin</a:t>
+            </a:r>
+            <a:r>
+              <a:rPr lang="en-US" dirty="0" smtClean="0">
+                <a:latin typeface="Times New Roman" pitchFamily="18" charset="0"/>
+                <a:cs typeface="Times New Roman" pitchFamily="18" charset="0"/>
+              </a:rPr>
+              <a:t>.</a:t>
+            </a:r>
+            <a:endParaRPr lang="ru-RU" dirty="0" smtClean="0">
+              <a:latin typeface="Times New Roman" pitchFamily="18" charset="0"/>
+              <a:cs typeface="Times New Roman" pitchFamily="18" charset="0"/>
+            </a:endParaRPr>
+          </a:p>
+          <a:p>
+            <a:pPr indent="450000" algn="just">
+              <a:buNone/>
+            </a:pPr>
+            <a:r>
+              <a:rPr lang="en-US" b="1" dirty="0" smtClean="0">
+                <a:latin typeface="Times New Roman" pitchFamily="18" charset="0"/>
+                <a:cs typeface="Times New Roman" pitchFamily="18" charset="0"/>
+              </a:rPr>
+              <a:t>UI</a:t>
+            </a:r>
+            <a:r>
+              <a:rPr lang="ru-RU" b="1" dirty="0" smtClean="0">
+                <a:latin typeface="Times New Roman" pitchFamily="18" charset="0"/>
+                <a:cs typeface="Times New Roman" pitchFamily="18" charset="0"/>
+              </a:rPr>
+              <a:t>:</a:t>
+            </a:r>
+            <a:r>
+              <a:rPr lang="ru-RU" dirty="0" smtClean="0">
+                <a:latin typeface="Times New Roman" pitchFamily="18" charset="0"/>
+                <a:cs typeface="Times New Roman" pitchFamily="18" charset="0"/>
+              </a:rPr>
+              <a:t> </a:t>
+            </a:r>
+            <a:r>
+              <a:rPr lang="en-US" dirty="0" smtClean="0">
+                <a:latin typeface="Times New Roman" pitchFamily="18" charset="0"/>
+                <a:cs typeface="Times New Roman" pitchFamily="18" charset="0"/>
+              </a:rPr>
+              <a:t>Jetpack Compose</a:t>
+            </a:r>
+            <a:r>
+              <a:rPr lang="en-US" dirty="0" smtClean="0">
+                <a:latin typeface="Times New Roman" pitchFamily="18" charset="0"/>
+                <a:cs typeface="Times New Roman" pitchFamily="18" charset="0"/>
+              </a:rPr>
+              <a:t>.</a:t>
+            </a:r>
+            <a:endParaRPr lang="ru-RU" dirty="0" smtClean="0">
+              <a:latin typeface="Times New Roman" pitchFamily="18" charset="0"/>
+              <a:cs typeface="Times New Roman" pitchFamily="18" charset="0"/>
+            </a:endParaRPr>
+          </a:p>
+          <a:p>
+            <a:pPr indent="450000" algn="just">
+              <a:buNone/>
+            </a:pPr>
+            <a:r>
+              <a:rPr lang="ru-RU" b="1" dirty="0" smtClean="0">
+                <a:latin typeface="Times New Roman" pitchFamily="18" charset="0"/>
+                <a:cs typeface="Times New Roman" pitchFamily="18" charset="0"/>
+              </a:rPr>
+              <a:t>База данных:</a:t>
+            </a:r>
+            <a:r>
+              <a:rPr lang="ru-RU" dirty="0" smtClean="0">
+                <a:latin typeface="Times New Roman" pitchFamily="18" charset="0"/>
+                <a:cs typeface="Times New Roman" pitchFamily="18" charset="0"/>
+              </a:rPr>
+              <a:t> </a:t>
+            </a:r>
+            <a:r>
+              <a:rPr lang="en-US" dirty="0" err="1" smtClean="0">
+                <a:latin typeface="Times New Roman" pitchFamily="18" charset="0"/>
+                <a:cs typeface="Times New Roman" pitchFamily="18" charset="0"/>
+              </a:rPr>
+              <a:t>Supabase</a:t>
+            </a:r>
+            <a:r>
+              <a:rPr lang="en-US" dirty="0" smtClean="0">
+                <a:latin typeface="Times New Roman" pitchFamily="18" charset="0"/>
+                <a:cs typeface="Times New Roman" pitchFamily="18" charset="0"/>
+              </a:rPr>
+              <a:t> (</a:t>
+            </a:r>
+            <a:r>
+              <a:rPr lang="ru-RU" dirty="0" smtClean="0">
+                <a:latin typeface="Times New Roman" pitchFamily="18" charset="0"/>
+                <a:cs typeface="Times New Roman" pitchFamily="18" charset="0"/>
+              </a:rPr>
+              <a:t>реляционная</a:t>
+            </a:r>
+            <a:r>
+              <a:rPr lang="ru-RU" dirty="0" smtClean="0">
+                <a:latin typeface="Times New Roman" pitchFamily="18" charset="0"/>
+                <a:cs typeface="Times New Roman" pitchFamily="18" charset="0"/>
+              </a:rPr>
+              <a:t>).</a:t>
+            </a:r>
+          </a:p>
+          <a:p>
+            <a:pPr indent="450000" algn="just">
+              <a:buNone/>
+            </a:pPr>
+            <a:endParaRPr lang="ru-RU" dirty="0" smtClean="0"/>
           </a:p>
           <a:p>
             <a:endParaRPr lang="ru-RU" dirty="0"/>
@@ -3515,7 +3554,7 @@
         </p:blipFill>
         <p:spPr bwMode="auto">
           <a:xfrm>
-            <a:off x="285720" y="2786058"/>
+            <a:off x="323528" y="2924944"/>
             <a:ext cx="2600326" cy="1457325"/>
           </a:xfrm>
           <a:prstGeom prst="rect">
@@ -3524,6 +3563,140 @@
           <a:noFill/>
         </p:spPr>
       </p:pic>
+      <p:sp>
+        <p:nvSpPr>
+          <p:cNvPr id="5" name="TextBox 4"/>
+          <p:cNvSpPr txBox="1"/>
+          <p:nvPr/>
+        </p:nvSpPr>
+        <p:spPr>
+          <a:xfrm>
+            <a:off x="3707904" y="3861048"/>
+            <a:ext cx="4968552" cy="2492990"/>
+          </a:xfrm>
+          <a:prstGeom prst="rect">
+            <a:avLst/>
+          </a:prstGeom>
+          <a:noFill/>
+        </p:spPr>
+        <p:txBody>
+          <a:bodyPr wrap="square" rtlCol="0">
+            <a:spAutoFit/>
+          </a:bodyPr>
+          <a:lstStyle/>
+          <a:p>
+            <a:r>
+              <a:rPr lang="ru-RU" sz="2400" b="1" dirty="0" smtClean="0">
+                <a:latin typeface="Times New Roman" pitchFamily="18" charset="0"/>
+                <a:cs typeface="Times New Roman" pitchFamily="18" charset="0"/>
+              </a:rPr>
+              <a:t>Реализованный функционал</a:t>
+            </a:r>
+            <a:r>
+              <a:rPr lang="ru-RU" sz="2400" b="1" dirty="0" smtClean="0">
+                <a:latin typeface="Times New Roman" pitchFamily="18" charset="0"/>
+                <a:cs typeface="Times New Roman" pitchFamily="18" charset="0"/>
+              </a:rPr>
+              <a:t>:</a:t>
+            </a:r>
+            <a:endParaRPr lang="ru-RU" sz="2400" dirty="0" smtClean="0">
+              <a:latin typeface="Times New Roman" pitchFamily="18" charset="0"/>
+              <a:cs typeface="Times New Roman" pitchFamily="18" charset="0"/>
+            </a:endParaRPr>
+          </a:p>
+          <a:p>
+            <a:pPr>
+              <a:buFontTx/>
+              <a:buChar char="-"/>
+            </a:pPr>
+            <a:r>
+              <a:rPr lang="ru-RU" sz="2400" dirty="0" smtClean="0">
+                <a:latin typeface="Times New Roman" pitchFamily="18" charset="0"/>
+                <a:cs typeface="Times New Roman" pitchFamily="18" charset="0"/>
+              </a:rPr>
+              <a:t>Авторизация.</a:t>
+            </a:r>
+          </a:p>
+          <a:p>
+            <a:pPr>
+              <a:buFontTx/>
+              <a:buChar char="-"/>
+            </a:pPr>
+            <a:r>
+              <a:rPr lang="ru-RU" sz="2400" dirty="0" smtClean="0">
+                <a:latin typeface="Times New Roman" pitchFamily="18" charset="0"/>
+                <a:cs typeface="Times New Roman" pitchFamily="18" charset="0"/>
+              </a:rPr>
+              <a:t>Регистрация.</a:t>
+            </a:r>
+          </a:p>
+          <a:p>
+            <a:pPr>
+              <a:buFontTx/>
+              <a:buChar char="-"/>
+            </a:pPr>
+            <a:r>
+              <a:rPr lang="ru-RU" sz="2400" dirty="0" smtClean="0">
+                <a:latin typeface="Times New Roman" pitchFamily="18" charset="0"/>
+                <a:cs typeface="Times New Roman" pitchFamily="18" charset="0"/>
+              </a:rPr>
+              <a:t>Подтверждение </a:t>
+            </a:r>
+            <a:r>
+              <a:rPr lang="ru-RU" sz="2400" dirty="0" smtClean="0">
+                <a:latin typeface="Times New Roman" pitchFamily="18" charset="0"/>
+                <a:cs typeface="Times New Roman" pitchFamily="18" charset="0"/>
+              </a:rPr>
+              <a:t>по </a:t>
+            </a:r>
+            <a:r>
+              <a:rPr lang="ru-RU" sz="2400" dirty="0" smtClean="0">
+                <a:latin typeface="Times New Roman" pitchFamily="18" charset="0"/>
+                <a:cs typeface="Times New Roman" pitchFamily="18" charset="0"/>
+              </a:rPr>
+              <a:t>OTP-коду.</a:t>
+            </a:r>
+            <a:endParaRPr lang="ru-RU" sz="2400" dirty="0" smtClean="0">
+              <a:latin typeface="Times New Roman" pitchFamily="18" charset="0"/>
+              <a:cs typeface="Times New Roman" pitchFamily="18" charset="0"/>
+            </a:endParaRPr>
+          </a:p>
+          <a:p>
+            <a:pPr>
+              <a:buFontTx/>
+              <a:buChar char="-"/>
+            </a:pPr>
+            <a:r>
+              <a:rPr lang="ru-RU" sz="2400" dirty="0" smtClean="0">
+                <a:latin typeface="Times New Roman" pitchFamily="18" charset="0"/>
+                <a:cs typeface="Times New Roman" pitchFamily="18" charset="0"/>
+              </a:rPr>
+              <a:t> Операции </a:t>
+            </a:r>
+            <a:r>
+              <a:rPr lang="ru-RU" sz="2400" dirty="0" smtClean="0">
+                <a:latin typeface="Times New Roman" pitchFamily="18" charset="0"/>
+                <a:cs typeface="Times New Roman" pitchFamily="18" charset="0"/>
+              </a:rPr>
+              <a:t>чтения и записи данных</a:t>
+            </a:r>
+            <a:r>
+              <a:rPr lang="ru-RU" dirty="0" smtClean="0"/>
+              <a:t>.</a:t>
+            </a:r>
+          </a:p>
+          <a:p>
+            <a:pPr>
+              <a:buFontTx/>
+              <a:buChar char="-"/>
+            </a:pPr>
+            <a:endParaRPr lang="ru-RU" dirty="0" smtClean="0"/>
+          </a:p>
+          <a:p>
+            <a:endParaRPr lang="ru-RU" dirty="0"/>
+          </a:p>
+        </p:txBody>
+      </p:sp>
     </p:spTree>
   </p:cSld>
   <p:clrMapOvr>
@@ -3702,7 +3875,7 @@
         </p:spPr>
         <p:txBody>
           <a:bodyPr>
-            <a:normAutofit fontScale="85000" lnSpcReduction="10000"/>
+            <a:normAutofit fontScale="85000" lnSpcReduction="20000"/>
           </a:bodyPr>
           <a:lstStyle/>
           <a:p>
@@ -3714,115 +3887,108 @@
                 <a:latin typeface="Times New Roman" pitchFamily="18" charset="0"/>
                 <a:cs typeface="Times New Roman" pitchFamily="18" charset="0"/>
               </a:rPr>
-              <a:t>           В качестве архитектурного решения был выбран паттерн MVVM</a:t>
+              <a:t>           В качестве архитектурного решения был выбран паттерн </a:t>
             </a:r>
             <a:r>
               <a:rPr lang="ru-RU" b="1" dirty="0" smtClean="0">
                 <a:latin typeface="Times New Roman" pitchFamily="18" charset="0"/>
                 <a:cs typeface="Times New Roman" pitchFamily="18" charset="0"/>
               </a:rPr>
+              <a:t>MVVM (</a:t>
+            </a:r>
+            <a:r>
+              <a:rPr lang="ru-RU" b="1" dirty="0" err="1" smtClean="0">
+                <a:latin typeface="Times New Roman" pitchFamily="18" charset="0"/>
+                <a:cs typeface="Times New Roman" pitchFamily="18" charset="0"/>
+              </a:rPr>
+              <a:t>Model</a:t>
+            </a:r>
+            <a:r>
+              <a:rPr lang="ru-RU" b="1" dirty="0" smtClean="0">
+                <a:latin typeface="Times New Roman" pitchFamily="18" charset="0"/>
+                <a:cs typeface="Times New Roman" pitchFamily="18" charset="0"/>
+              </a:rPr>
+              <a:t>–</a:t>
+            </a:r>
+            <a:r>
+              <a:rPr lang="ru-RU" b="1" dirty="0" err="1" smtClean="0">
+                <a:latin typeface="Times New Roman" pitchFamily="18" charset="0"/>
+                <a:cs typeface="Times New Roman" pitchFamily="18" charset="0"/>
+              </a:rPr>
+              <a:t>View</a:t>
+            </a:r>
+            <a:r>
+              <a:rPr lang="ru-RU" b="1" dirty="0" smtClean="0">
+                <a:latin typeface="Times New Roman" pitchFamily="18" charset="0"/>
+                <a:cs typeface="Times New Roman" pitchFamily="18" charset="0"/>
+              </a:rPr>
+              <a:t>–</a:t>
+            </a:r>
+            <a:r>
+              <a:rPr lang="ru-RU" b="1" dirty="0" err="1" smtClean="0">
+                <a:latin typeface="Times New Roman" pitchFamily="18" charset="0"/>
+                <a:cs typeface="Times New Roman" pitchFamily="18" charset="0"/>
+              </a:rPr>
+              <a:t>ViewModel</a:t>
+            </a:r>
+            <a:r>
+              <a:rPr lang="ru-RU" b="1" dirty="0" smtClean="0">
+                <a:latin typeface="Times New Roman" pitchFamily="18" charset="0"/>
+                <a:cs typeface="Times New Roman" pitchFamily="18" charset="0"/>
+              </a:rPr>
+              <a:t>)</a:t>
+            </a:r>
+            <a:r>
+              <a:rPr lang="ru-RU" dirty="0" smtClean="0">
+                <a:latin typeface="Times New Roman" pitchFamily="18" charset="0"/>
+                <a:cs typeface="Times New Roman" pitchFamily="18" charset="0"/>
+              </a:rPr>
+              <a:t>., поскольку он обеспечивает эффективное взаимодействие с </a:t>
+            </a:r>
+            <a:r>
+              <a:rPr lang="ru-RU" b="1" dirty="0" err="1" smtClean="0">
+                <a:latin typeface="Times New Roman" pitchFamily="18" charset="0"/>
+                <a:cs typeface="Times New Roman" pitchFamily="18" charset="0"/>
+              </a:rPr>
+              <a:t>Jetpack</a:t>
+            </a:r>
+            <a:r>
+              <a:rPr lang="ru-RU" b="1" dirty="0" smtClean="0">
+                <a:latin typeface="Times New Roman" pitchFamily="18" charset="0"/>
+                <a:cs typeface="Times New Roman" pitchFamily="18" charset="0"/>
+              </a:rPr>
               <a:t> </a:t>
             </a:r>
             <a:r>
+              <a:rPr lang="ru-RU" b="1" dirty="0" err="1" smtClean="0">
+                <a:latin typeface="Times New Roman" pitchFamily="18" charset="0"/>
+                <a:cs typeface="Times New Roman" pitchFamily="18" charset="0"/>
+              </a:rPr>
+              <a:t>Compose</a:t>
+            </a:r>
+            <a:r>
               <a:rPr lang="ru-RU" dirty="0" smtClean="0">
                 <a:latin typeface="Times New Roman" pitchFamily="18" charset="0"/>
                 <a:cs typeface="Times New Roman" pitchFamily="18" charset="0"/>
               </a:rPr>
-              <a:t>(</a:t>
-            </a:r>
-            <a:r>
-              <a:rPr lang="ru-RU" dirty="0" err="1" smtClean="0">
-                <a:latin typeface="Times New Roman" pitchFamily="18" charset="0"/>
-                <a:cs typeface="Times New Roman" pitchFamily="18" charset="0"/>
-              </a:rPr>
-              <a:t>Model</a:t>
-            </a:r>
-            <a:r>
-              <a:rPr lang="ru-RU" dirty="0" smtClean="0">
-                <a:latin typeface="Times New Roman" pitchFamily="18" charset="0"/>
-                <a:cs typeface="Times New Roman" pitchFamily="18" charset="0"/>
-              </a:rPr>
-              <a:t>–</a:t>
-            </a:r>
-            <a:r>
-              <a:rPr lang="ru-RU" dirty="0" err="1" smtClean="0">
-                <a:latin typeface="Times New Roman" pitchFamily="18" charset="0"/>
-                <a:cs typeface="Times New Roman" pitchFamily="18" charset="0"/>
-              </a:rPr>
-              <a:t>View</a:t>
-            </a:r>
-            <a:r>
-              <a:rPr lang="ru-RU" dirty="0" smtClean="0">
-                <a:latin typeface="Times New Roman" pitchFamily="18" charset="0"/>
-                <a:cs typeface="Times New Roman" pitchFamily="18" charset="0"/>
-              </a:rPr>
-              <a:t>–</a:t>
-            </a:r>
-            <a:r>
-              <a:rPr lang="ru-RU" dirty="0" err="1" smtClean="0">
-                <a:latin typeface="Times New Roman" pitchFamily="18" charset="0"/>
-                <a:cs typeface="Times New Roman" pitchFamily="18" charset="0"/>
-              </a:rPr>
-              <a:t>ViewModel</a:t>
+              <a:t> и полностью соответствует лучшим практикам, рекомендованным </a:t>
+            </a:r>
+            <a:r>
+              <a:rPr lang="ru-RU" b="1" dirty="0" err="1" smtClean="0">
+                <a:latin typeface="Times New Roman" pitchFamily="18" charset="0"/>
+                <a:cs typeface="Times New Roman" pitchFamily="18" charset="0"/>
+              </a:rPr>
+              <a:t>Android</a:t>
             </a:r>
             <a:r>
               <a:rPr lang="ru-RU" b="1" dirty="0" smtClean="0">
                 <a:latin typeface="Times New Roman" pitchFamily="18" charset="0"/>
                 <a:cs typeface="Times New Roman" pitchFamily="18" charset="0"/>
               </a:rPr>
-              <a:t>)</a:t>
-            </a:r>
-            <a:r>
-              <a:rPr lang="ru-RU" dirty="0" smtClean="0">
-                <a:latin typeface="Times New Roman" pitchFamily="18" charset="0"/>
-                <a:cs typeface="Times New Roman" pitchFamily="18" charset="0"/>
-              </a:rPr>
-              <a:t>., поскольку он обеспечивает эффективное взаимодействие с </a:t>
-            </a:r>
-            <a:r>
-              <a:rPr lang="ru-RU" dirty="0" err="1" smtClean="0">
-                <a:latin typeface="Times New Roman" pitchFamily="18" charset="0"/>
-                <a:cs typeface="Times New Roman" pitchFamily="18" charset="0"/>
-              </a:rPr>
-              <a:t>Jetpack</a:t>
-            </a:r>
-            <a:r>
-              <a:rPr lang="ru-RU" dirty="0" smtClean="0">
-                <a:latin typeface="Times New Roman" pitchFamily="18" charset="0"/>
-                <a:cs typeface="Times New Roman" pitchFamily="18" charset="0"/>
-              </a:rPr>
               <a:t> </a:t>
             </a:r>
             <a:r>
-              <a:rPr lang="ru-RU" dirty="0" err="1" smtClean="0">
-                <a:latin typeface="Times New Roman" pitchFamily="18" charset="0"/>
-                <a:cs typeface="Times New Roman" pitchFamily="18" charset="0"/>
-              </a:rPr>
-              <a:t>Compose</a:t>
-            </a:r>
-            <a:r>
-              <a:rPr lang="ru-RU" dirty="0" smtClean="0">
-                <a:latin typeface="Times New Roman" pitchFamily="18" charset="0"/>
-                <a:cs typeface="Times New Roman" pitchFamily="18" charset="0"/>
-              </a:rPr>
-              <a:t> и полностью соответствует лучшим практикам, рекомендованным </a:t>
-            </a:r>
-            <a:r>
-              <a:rPr lang="ru-RU" dirty="0" err="1" smtClean="0">
-                <a:latin typeface="Times New Roman" pitchFamily="18" charset="0"/>
-                <a:cs typeface="Times New Roman" pitchFamily="18" charset="0"/>
-              </a:rPr>
-              <a:t>Android</a:t>
-            </a:r>
-            <a:r>
-              <a:rPr lang="ru-RU" dirty="0" smtClean="0">
-                <a:latin typeface="Times New Roman" pitchFamily="18" charset="0"/>
-                <a:cs typeface="Times New Roman" pitchFamily="18" charset="0"/>
-              </a:rPr>
-              <a:t> </a:t>
-            </a:r>
-            <a:r>
-              <a:rPr lang="ru-RU" dirty="0" err="1" smtClean="0">
+              <a:rPr lang="ru-RU" b="1" dirty="0" err="1" smtClean="0">
                 <a:latin typeface="Times New Roman" pitchFamily="18" charset="0"/>
                 <a:cs typeface="Times New Roman" pitchFamily="18" charset="0"/>
               </a:rPr>
@@ -3844,6 +4010,7 @@
               <a:rPr lang="ru-RU" dirty="0" smtClean="0"/>
               <a:t>             </a:t>
             </a:r>
+            <a:endParaRPr lang="ru-RU" dirty="0" smtClean="0"/>
           </a:p>
           <a:p>
             <a:pPr>
@@ -3873,7 +4040,7 @@
         </p:nvSpPr>
         <p:spPr>
           <a:xfrm>
-            <a:off x="785786" y="3571876"/>
+            <a:off x="755576" y="3789040"/>
             <a:ext cx="7643866" cy="2277547"/>
           </a:xfrm>
           <a:prstGeom prst="rect">
@@ -3906,14 +4073,23 @@
               <a:t>Модели</a:t>
             </a:r>
             <a:r>
-              <a:rPr lang="ru-RU" sz="2800" dirty="0" smtClean="0"/>
+              <a:rPr lang="ru-RU" sz="2800" dirty="0" smtClean="0">
+                <a:latin typeface="Times New Roman" pitchFamily="18" charset="0"/>
+                <a:cs typeface="Times New Roman" pitchFamily="18" charset="0"/>
+              </a:rPr>
               <a:t> данных: расположены </a:t>
             </a:r>
             <a:r>
-              <a:rPr lang="en-US" sz="2800" dirty="0" smtClean="0"/>
+              <a:rPr lang="en-US" sz="2800" dirty="0" smtClean="0">
+                <a:latin typeface="Times New Roman" pitchFamily="18" charset="0"/>
+                <a:cs typeface="Times New Roman" pitchFamily="18" charset="0"/>
+              </a:rPr>
               <a:t>data/model</a:t>
             </a:r>
-            <a:endParaRPr lang="ru-RU" sz="2800" dirty="0" smtClean="0"/>
+            <a:endParaRPr lang="ru-RU" sz="2800" dirty="0" smtClean="0">
+              <a:latin typeface="Times New Roman" pitchFamily="18" charset="0"/>
+              <a:cs typeface="Times New Roman" pitchFamily="18" charset="0"/>
+            </a:endParaRPr>
           </a:p>
           <a:p>
             <a:pPr lvl="1">
@@ -3921,26 +4097,44 @@
               <a:buChar char="•"/>
             </a:pPr>
             <a:r>
-              <a:rPr lang="en-US" sz="2800" dirty="0" smtClean="0"/>
+              <a:rPr lang="en-US" sz="2800" dirty="0" smtClean="0">
+                <a:latin typeface="Times New Roman" pitchFamily="18" charset="0"/>
+                <a:cs typeface="Times New Roman" pitchFamily="18" charset="0"/>
+              </a:rPr>
               <a:t> </a:t>
             </a:r>
             <a:r>
-              <a:rPr lang="ru-RU" sz="2800" dirty="0" smtClean="0"/>
+              <a:rPr lang="ru-RU" sz="2800" dirty="0" smtClean="0">
+                <a:latin typeface="Times New Roman" pitchFamily="18" charset="0"/>
+                <a:cs typeface="Times New Roman" pitchFamily="18" charset="0"/>
+              </a:rPr>
               <a:t>Работа с </a:t>
             </a:r>
             <a:r>
-              <a:rPr lang="en-US" sz="2800" dirty="0" smtClean="0"/>
+              <a:rPr lang="en-US" sz="2800" dirty="0" smtClean="0">
+                <a:latin typeface="Times New Roman" pitchFamily="18" charset="0"/>
+                <a:cs typeface="Times New Roman" pitchFamily="18" charset="0"/>
+              </a:rPr>
               <a:t>API: </a:t>
             </a:r>
             <a:r>
-              <a:rPr lang="ru-RU" sz="2800" dirty="0" smtClean="0"/>
+              <a:rPr lang="ru-RU" sz="2800" dirty="0" smtClean="0">
+                <a:latin typeface="Times New Roman" pitchFamily="18" charset="0"/>
+                <a:cs typeface="Times New Roman" pitchFamily="18" charset="0"/>
+              </a:rPr>
               <a:t>расположены </a:t>
             </a:r>
             <a:r>
-              <a:rPr lang="en-US" sz="2800" dirty="0" smtClean="0"/>
+              <a:rPr lang="en-US" sz="2800" dirty="0" smtClean="0">
+                <a:latin typeface="Times New Roman" pitchFamily="18" charset="0"/>
+                <a:cs typeface="Times New Roman" pitchFamily="18" charset="0"/>
+              </a:rPr>
               <a:t>data/service</a:t>
             </a:r>
-            <a:endParaRPr lang="ru-RU" sz="2800" dirty="0" smtClean="0"/>
+            <a:endParaRPr lang="ru-RU" sz="2800" dirty="0" smtClean="0">
+              <a:latin typeface="Times New Roman" pitchFamily="18" charset="0"/>
+              <a:cs typeface="Times New Roman" pitchFamily="18" charset="0"/>
+            </a:endParaRPr>
           </a:p>
           <a:p>
             <a:pPr lvl="1">
@@ -3948,26 +4142,44 @@
               <a:buChar char="•"/>
             </a:pPr>
             <a:r>
-              <a:rPr lang="ru-RU" sz="2800" dirty="0" smtClean="0"/>
+              <a:rPr lang="ru-RU" sz="2800" dirty="0" smtClean="0">
+                <a:latin typeface="Times New Roman" pitchFamily="18" charset="0"/>
+                <a:cs typeface="Times New Roman" pitchFamily="18" charset="0"/>
+              </a:rPr>
               <a:t> </a:t>
             </a:r>
             <a:r>
-              <a:rPr lang="en-US" sz="2800" dirty="0" smtClean="0"/>
+              <a:rPr lang="en-US" sz="2800" dirty="0" smtClean="0">
+                <a:latin typeface="Times New Roman" pitchFamily="18" charset="0"/>
+                <a:cs typeface="Times New Roman" pitchFamily="18" charset="0"/>
+              </a:rPr>
               <a:t>UI-</a:t>
             </a:r>
             <a:r>
-              <a:rPr lang="ru-RU" sz="2800" dirty="0" smtClean="0"/>
+              <a:rPr lang="ru-RU" sz="2800" dirty="0" smtClean="0">
+                <a:latin typeface="Times New Roman" pitchFamily="18" charset="0"/>
+                <a:cs typeface="Times New Roman" pitchFamily="18" charset="0"/>
+              </a:rPr>
               <a:t>компоненты:  расположены </a:t>
             </a:r>
             <a:r>
-              <a:rPr lang="en-US" sz="2800" dirty="0" err="1" smtClean="0"/>
+              <a:rPr lang="en-US" sz="2800" dirty="0" err="1" smtClean="0">
+                <a:latin typeface="Times New Roman" pitchFamily="18" charset="0"/>
+                <a:cs typeface="Times New Roman" pitchFamily="18" charset="0"/>
+              </a:rPr>
               <a:t>ui</a:t>
             </a:r>
             <a:r>
-              <a:rPr lang="en-US" sz="2800" dirty="0" smtClean="0"/>
+              <a:rPr lang="en-US" sz="2800" dirty="0" smtClean="0">
+                <a:latin typeface="Times New Roman" pitchFamily="18" charset="0"/>
+                <a:cs typeface="Times New Roman" pitchFamily="18" charset="0"/>
+              </a:rPr>
               <a:t>/screens</a:t>
             </a:r>
-            <a:endParaRPr lang="ru-RU" sz="2800" dirty="0" smtClean="0"/>
+            <a:endParaRPr lang="ru-RU" sz="2800" dirty="0" smtClean="0">
+              <a:latin typeface="Times New Roman" pitchFamily="18" charset="0"/>
+              <a:cs typeface="Times New Roman" pitchFamily="18" charset="0"/>
+            </a:endParaRPr>
           </a:p>
           <a:p>
             <a:pPr lvl="1">
@@ -3975,18 +4187,30 @@
               <a:buChar char="•"/>
             </a:pPr>
             <a:r>
-              <a:rPr lang="ru-RU" sz="2800" dirty="0" smtClean="0"/>
+              <a:rPr lang="ru-RU" sz="2800" dirty="0" smtClean="0">
+                <a:latin typeface="Times New Roman" pitchFamily="18" charset="0"/>
+                <a:cs typeface="Times New Roman" pitchFamily="18" charset="0"/>
+              </a:rPr>
               <a:t> Темы: расположены </a:t>
             </a:r>
             <a:r>
-              <a:rPr lang="en-US" sz="2800" dirty="0" err="1" smtClean="0"/>
+              <a:rPr lang="en-US" sz="2800" dirty="0" err="1" smtClean="0">
+                <a:latin typeface="Times New Roman" pitchFamily="18" charset="0"/>
+                <a:cs typeface="Times New Roman" pitchFamily="18" charset="0"/>
+              </a:rPr>
               <a:t>ui</a:t>
             </a:r>
             <a:r>
-              <a:rPr lang="en-US" sz="2800" dirty="0" smtClean="0"/>
+              <a:rPr lang="en-US" sz="2800" dirty="0" smtClean="0">
+                <a:latin typeface="Times New Roman" pitchFamily="18" charset="0"/>
+                <a:cs typeface="Times New Roman" pitchFamily="18" charset="0"/>
+              </a:rPr>
               <a:t>/theme</a:t>
             </a:r>
-            <a:endParaRPr lang="ru-RU" sz="2800" dirty="0" smtClean="0"/>
+            <a:endParaRPr lang="ru-RU" sz="2800" dirty="0" smtClean="0">
+              <a:latin typeface="Times New Roman" pitchFamily="18" charset="0"/>
+              <a:cs typeface="Times New Roman" pitchFamily="18" charset="0"/>
+            </a:endParaRPr>
           </a:p>
           <a:p>
             <a:pPr lvl="1">
@@ -3994,34 +4218,58 @@
               <a:buChar char="•"/>
             </a:pPr>
             <a:r>
-              <a:rPr lang="ru-RU" sz="2800" dirty="0" smtClean="0"/>
+              <a:rPr lang="ru-RU" sz="2800" dirty="0" smtClean="0">
+                <a:latin typeface="Times New Roman" pitchFamily="18" charset="0"/>
+                <a:cs typeface="Times New Roman" pitchFamily="18" charset="0"/>
+              </a:rPr>
               <a:t> </a:t>
             </a:r>
             <a:r>
-              <a:rPr lang="en-US" sz="2800" dirty="0" err="1" smtClean="0"/>
+              <a:rPr lang="en-US" sz="2800" dirty="0" err="1" smtClean="0">
+                <a:latin typeface="Times New Roman" pitchFamily="18" charset="0"/>
+                <a:cs typeface="Times New Roman" pitchFamily="18" charset="0"/>
+              </a:rPr>
               <a:t>ViewModel</a:t>
             </a:r>
             <a:r>
-              <a:rPr lang="en-US" sz="2800" dirty="0" smtClean="0"/>
+              <a:rPr lang="en-US" sz="2800" dirty="0" smtClean="0">
+                <a:latin typeface="Times New Roman" pitchFamily="18" charset="0"/>
+                <a:cs typeface="Times New Roman" pitchFamily="18" charset="0"/>
+              </a:rPr>
               <a:t>:</a:t>
             </a:r>
             <a:r>
-              <a:rPr lang="ru-RU" sz="2800" dirty="0" smtClean="0"/>
+              <a:rPr lang="ru-RU" sz="2800" dirty="0" smtClean="0">
+                <a:latin typeface="Times New Roman" pitchFamily="18" charset="0"/>
+                <a:cs typeface="Times New Roman" pitchFamily="18" charset="0"/>
+              </a:rPr>
               <a:t> расположены </a:t>
             </a:r>
             <a:r>
-              <a:rPr lang="en-US" sz="2800" dirty="0" err="1" smtClean="0"/>
+              <a:rPr lang="en-US" sz="2800" dirty="0" err="1" smtClean="0">
+                <a:latin typeface="Times New Roman" pitchFamily="18" charset="0"/>
+                <a:cs typeface="Times New Roman" pitchFamily="18" charset="0"/>
+              </a:rPr>
               <a:t>ui</a:t>
             </a:r>
             <a:r>
-              <a:rPr lang="en-US" sz="2800" dirty="0" smtClean="0"/>
+              <a:rPr lang="en-US" sz="2800" dirty="0" smtClean="0">
+                <a:latin typeface="Times New Roman" pitchFamily="18" charset="0"/>
+                <a:cs typeface="Times New Roman" pitchFamily="18" charset="0"/>
+              </a:rPr>
               <a:t>/</a:t>
             </a:r>
             <a:r>
-              <a:rPr lang="en-US" sz="2800" dirty="0" err="1" smtClean="0"/>
+              <a:rPr lang="en-US" sz="2800" dirty="0" err="1" smtClean="0">
+                <a:latin typeface="Times New Roman" pitchFamily="18" charset="0"/>
+                <a:cs typeface="Times New Roman" pitchFamily="18" charset="0"/>
+              </a:rPr>
               <a:t>viewModel</a:t>
             </a:r>
-            <a:endParaRPr lang="ru-RU" sz="2800" dirty="0"/>
+            <a:endParaRPr lang="ru-RU" sz="2800" dirty="0">
+              <a:latin typeface="Times New Roman" pitchFamily="18" charset="0"/>
+              <a:cs typeface="Times New Roman" pitchFamily="18" charset="0"/>
+            </a:endParaRPr>
           </a:p>
         </p:txBody>
       </p:sp>
@@ -4103,22 +4351,29 @@
         </p:nvSpPr>
         <p:spPr>
           <a:xfrm>
-            <a:off x="357158" y="1785926"/>
-            <a:ext cx="8358246" cy="3929090"/>
+            <a:off x="539552" y="1916832"/>
+            <a:ext cx="8280920" cy="3600400"/>
           </a:xfrm>
         </p:spPr>
         <p:txBody>
           <a:bodyPr>
-            <a:normAutofit/>
+            <a:normAutofit lnSpcReduction="10000"/>
           </a:bodyPr>
           <a:lstStyle/>
           <a:p>
             <a:r>
+              <a:rPr lang="en-US" b="1" dirty="0" smtClean="0">
+                <a:latin typeface="Times New Roman" pitchFamily="18" charset="0"/>
+                <a:cs typeface="Times New Roman" pitchFamily="18" charset="0"/>
+              </a:rPr>
+              <a:t>Retrofit 2 </a:t>
+            </a:r>
+            <a:r>
               <a:rPr lang="en-US" dirty="0" smtClean="0">
                 <a:latin typeface="Times New Roman" pitchFamily="18" charset="0"/>
                 <a:cs typeface="Times New Roman" pitchFamily="18" charset="0"/>
               </a:rPr>
-              <a:t>Retrofit 2 - </a:t>
+              <a:t>- </a:t>
             </a:r>
             <a:r>
               <a:rPr lang="ru-RU" dirty="0" smtClean="0">
@@ -4134,11 +4389,18 @@
           </a:p>
           <a:p>
             <a:r>
+              <a:rPr lang="en-US" b="1" dirty="0" smtClean="0">
+                <a:latin typeface="Times New Roman" pitchFamily="18" charset="0"/>
+                <a:cs typeface="Times New Roman" pitchFamily="18" charset="0"/>
+              </a:rPr>
+              <a:t>Navigation Compose </a:t>
+            </a:r>
+            <a:r>
               <a:rPr lang="en-US" dirty="0" smtClean="0">
                 <a:latin typeface="Times New Roman" pitchFamily="18" charset="0"/>
                 <a:cs typeface="Times New Roman" pitchFamily="18" charset="0"/>
               </a:rPr>
-              <a:t>Navigation Compose - </a:t>
+              <a:t>- </a:t>
             </a:r>
             <a:r>
               <a:rPr lang="ru-RU" dirty="0" smtClean="0">
@@ -4196,11 +4458,18 @@
           </a:p>
           <a:p>
             <a:r>
+              <a:rPr lang="en-US" b="1" dirty="0" smtClean="0">
+                <a:latin typeface="Times New Roman" pitchFamily="18" charset="0"/>
+                <a:cs typeface="Times New Roman" pitchFamily="18" charset="0"/>
+              </a:rPr>
+              <a:t>Material 3 </a:t>
+            </a:r>
+            <a:r>
               <a:rPr lang="en-US" dirty="0" smtClean="0">
                 <a:latin typeface="Times New Roman" pitchFamily="18" charset="0"/>
                 <a:cs typeface="Times New Roman" pitchFamily="18" charset="0"/>
               </a:rPr>
-              <a:t>Material 3 - </a:t>
+              <a:t>- </a:t>
             </a:r>
             <a:r>
               <a:rPr lang="ru-RU" dirty="0" smtClean="0">
